--- a/profile/images/activities.pptx
+++ b/profile/images/activities.pptx
@@ -104,6 +104,11 @@
       </a:defRPr>
     </a:lvl9pPr>
   </p:defaultTextStyle>
+  <p:extLst>
+    <p:ext uri="{EFAFB233-063F-42B5-8137-9DF3F51BA10A}">
+      <p15:sldGuideLst xmlns:p15="http://schemas.microsoft.com/office/powerpoint/2012/main"/>
+    </p:ext>
+  </p:extLst>
 </p:presentation>
 </file>
 
@@ -120,12 +125,12 @@
   <pc:docChgLst>
     <pc:chgData name="Kristoffer Gulmark Poulsen" userId="ad511437-3b62-45cf-8f4e-1fb459602f33" providerId="ADAL" clId="{1F7BF2AE-28F5-48AC-A1F8-94893075803A}"/>
     <pc:docChg chg="undo custSel addSld modSld">
-      <pc:chgData name="Kristoffer Gulmark Poulsen" userId="ad511437-3b62-45cf-8f4e-1fb459602f33" providerId="ADAL" clId="{1F7BF2AE-28F5-48AC-A1F8-94893075803A}" dt="2023-04-27T11:23:53.343" v="553" actId="20577"/>
+      <pc:chgData name="Kristoffer Gulmark Poulsen" userId="ad511437-3b62-45cf-8f4e-1fb459602f33" providerId="ADAL" clId="{1F7BF2AE-28F5-48AC-A1F8-94893075803A}" dt="2023-04-27T11:35:52.843" v="554" actId="20577"/>
       <pc:docMkLst>
         <pc:docMk/>
       </pc:docMkLst>
       <pc:sldChg chg="addSp delSp modSp new mod modClrScheme chgLayout">
-        <pc:chgData name="Kristoffer Gulmark Poulsen" userId="ad511437-3b62-45cf-8f4e-1fb459602f33" providerId="ADAL" clId="{1F7BF2AE-28F5-48AC-A1F8-94893075803A}" dt="2023-04-27T11:23:53.343" v="553" actId="20577"/>
+        <pc:chgData name="Kristoffer Gulmark Poulsen" userId="ad511437-3b62-45cf-8f4e-1fb459602f33" providerId="ADAL" clId="{1F7BF2AE-28F5-48AC-A1F8-94893075803A}" dt="2023-04-27T11:35:52.843" v="554" actId="20577"/>
         <pc:sldMkLst>
           <pc:docMk/>
           <pc:sldMk cId="1355665285" sldId="256"/>
@@ -147,7 +152,7 @@
           </ac:spMkLst>
         </pc:spChg>
         <pc:spChg chg="add mod">
-          <ac:chgData name="Kristoffer Gulmark Poulsen" userId="ad511437-3b62-45cf-8f4e-1fb459602f33" providerId="ADAL" clId="{1F7BF2AE-28F5-48AC-A1F8-94893075803A}" dt="2023-04-27T11:23:53.343" v="553" actId="20577"/>
+          <ac:chgData name="Kristoffer Gulmark Poulsen" userId="ad511437-3b62-45cf-8f4e-1fb459602f33" providerId="ADAL" clId="{1F7BF2AE-28F5-48AC-A1F8-94893075803A}" dt="2023-04-27T11:35:52.843" v="554" actId="20577"/>
           <ac:spMkLst>
             <pc:docMk/>
             <pc:sldMk cId="1355665285" sldId="256"/>
@@ -3581,18 +3586,7 @@
                     <a:schemeClr val="accent1"/>
                   </a:solidFill>
                 </a:rPr>
-                <a:t>Research Projects</a:t>
-              </a:r>
-            </a:p>
-            <a:p>
-              <a:pPr algn="ctr"/>
-              <a:r>
-                <a:rPr lang="en-US" sz="1200" b="1" dirty="0">
-                  <a:solidFill>
-                    <a:schemeClr val="accent1"/>
-                  </a:solidFill>
-                </a:rPr>
-                <a:t>Consultancy</a:t>
+                <a:t>Research Consultancy</a:t>
               </a:r>
             </a:p>
           </p:txBody>

--- a/profile/images/activities.pptx
+++ b/profile/images/activities.pptx
@@ -115,7 +115,7 @@
 <file path=ppt/revisionInfo.xml><?xml version="1.0" encoding="utf-8"?>
 <p1510:revInfo xmlns:a="http://schemas.openxmlformats.org/drawingml/2006/main" xmlns:r="http://schemas.openxmlformats.org/officeDocument/2006/relationships" xmlns:p1510="http://schemas.microsoft.com/office/powerpoint/2015/10/main">
   <p1510:revLst>
-    <p1510:client id="{1F7BF2AE-28F5-48AC-A1F8-94893075803A}" v="15" dt="2023-04-27T11:19:57.568"/>
+    <p1510:client id="{1F7BF2AE-28F5-48AC-A1F8-94893075803A}" v="16" dt="2023-04-27T12:10:58.962"/>
   </p1510:revLst>
 </p1510:revInfo>
 </file>
@@ -125,12 +125,12 @@
   <pc:docChgLst>
     <pc:chgData name="Kristoffer Gulmark Poulsen" userId="ad511437-3b62-45cf-8f4e-1fb459602f33" providerId="ADAL" clId="{1F7BF2AE-28F5-48AC-A1F8-94893075803A}"/>
     <pc:docChg chg="undo custSel addSld modSld">
-      <pc:chgData name="Kristoffer Gulmark Poulsen" userId="ad511437-3b62-45cf-8f4e-1fb459602f33" providerId="ADAL" clId="{1F7BF2AE-28F5-48AC-A1F8-94893075803A}" dt="2023-04-27T11:35:52.843" v="554" actId="20577"/>
+      <pc:chgData name="Kristoffer Gulmark Poulsen" userId="ad511437-3b62-45cf-8f4e-1fb459602f33" providerId="ADAL" clId="{1F7BF2AE-28F5-48AC-A1F8-94893075803A}" dt="2023-04-27T12:10:58.962" v="563" actId="165"/>
       <pc:docMkLst>
         <pc:docMk/>
       </pc:docMkLst>
       <pc:sldChg chg="addSp delSp modSp new mod modClrScheme chgLayout">
-        <pc:chgData name="Kristoffer Gulmark Poulsen" userId="ad511437-3b62-45cf-8f4e-1fb459602f33" providerId="ADAL" clId="{1F7BF2AE-28F5-48AC-A1F8-94893075803A}" dt="2023-04-27T11:35:52.843" v="554" actId="20577"/>
+        <pc:chgData name="Kristoffer Gulmark Poulsen" userId="ad511437-3b62-45cf-8f4e-1fb459602f33" providerId="ADAL" clId="{1F7BF2AE-28F5-48AC-A1F8-94893075803A}" dt="2023-04-27T12:10:58.962" v="563" actId="165"/>
         <pc:sldMkLst>
           <pc:docMk/>
           <pc:sldMk cId="1355665285" sldId="256"/>
@@ -151,8 +151,8 @@
             <ac:spMk id="3" creationId="{21786B73-839A-3114-0A4B-1A62B7543690}"/>
           </ac:spMkLst>
         </pc:spChg>
-        <pc:spChg chg="add mod">
-          <ac:chgData name="Kristoffer Gulmark Poulsen" userId="ad511437-3b62-45cf-8f4e-1fb459602f33" providerId="ADAL" clId="{1F7BF2AE-28F5-48AC-A1F8-94893075803A}" dt="2023-04-27T11:35:52.843" v="554" actId="20577"/>
+        <pc:spChg chg="add mod topLvl">
+          <ac:chgData name="Kristoffer Gulmark Poulsen" userId="ad511437-3b62-45cf-8f4e-1fb459602f33" providerId="ADAL" clId="{1F7BF2AE-28F5-48AC-A1F8-94893075803A}" dt="2023-04-27T12:10:58.962" v="563" actId="165"/>
           <ac:spMkLst>
             <pc:docMk/>
             <pc:sldMk cId="1355665285" sldId="256"/>
@@ -167,8 +167,8 @@
             <ac:spMk id="5" creationId="{6E1D7693-1016-44E7-9891-9822CC6F4B63}"/>
           </ac:spMkLst>
         </pc:spChg>
-        <pc:spChg chg="add mod">
-          <ac:chgData name="Kristoffer Gulmark Poulsen" userId="ad511437-3b62-45cf-8f4e-1fb459602f33" providerId="ADAL" clId="{1F7BF2AE-28F5-48AC-A1F8-94893075803A}" dt="2023-04-27T11:19:57.568" v="448" actId="164"/>
+        <pc:spChg chg="add mod topLvl">
+          <ac:chgData name="Kristoffer Gulmark Poulsen" userId="ad511437-3b62-45cf-8f4e-1fb459602f33" providerId="ADAL" clId="{1F7BF2AE-28F5-48AC-A1F8-94893075803A}" dt="2023-04-27T12:10:58.962" v="563" actId="165"/>
           <ac:spMkLst>
             <pc:docMk/>
             <pc:sldMk cId="1355665285" sldId="256"/>
@@ -183,8 +183,8 @@
             <ac:spMk id="7" creationId="{296A517A-A916-FB18-AA16-E48A466DBDF9}"/>
           </ac:spMkLst>
         </pc:spChg>
-        <pc:spChg chg="add mod">
-          <ac:chgData name="Kristoffer Gulmark Poulsen" userId="ad511437-3b62-45cf-8f4e-1fb459602f33" providerId="ADAL" clId="{1F7BF2AE-28F5-48AC-A1F8-94893075803A}" dt="2023-04-27T11:22:07.993" v="472" actId="20577"/>
+        <pc:spChg chg="add mod topLvl">
+          <ac:chgData name="Kristoffer Gulmark Poulsen" userId="ad511437-3b62-45cf-8f4e-1fb459602f33" providerId="ADAL" clId="{1F7BF2AE-28F5-48AC-A1F8-94893075803A}" dt="2023-04-27T12:10:58.962" v="563" actId="165"/>
           <ac:spMkLst>
             <pc:docMk/>
             <pc:sldMk cId="1355665285" sldId="256"/>
@@ -207,24 +207,24 @@
             <ac:spMk id="35" creationId="{83D99D2A-4C30-B83A-DE63-01D777E07B0A}"/>
           </ac:spMkLst>
         </pc:spChg>
-        <pc:spChg chg="add mod">
-          <ac:chgData name="Kristoffer Gulmark Poulsen" userId="ad511437-3b62-45cf-8f4e-1fb459602f33" providerId="ADAL" clId="{1F7BF2AE-28F5-48AC-A1F8-94893075803A}" dt="2023-04-27T11:19:57.568" v="448" actId="164"/>
+        <pc:spChg chg="add mod topLvl">
+          <ac:chgData name="Kristoffer Gulmark Poulsen" userId="ad511437-3b62-45cf-8f4e-1fb459602f33" providerId="ADAL" clId="{1F7BF2AE-28F5-48AC-A1F8-94893075803A}" dt="2023-04-27T12:10:58.962" v="563" actId="165"/>
           <ac:spMkLst>
             <pc:docMk/>
             <pc:sldMk cId="1355665285" sldId="256"/>
             <ac:spMk id="45" creationId="{DA727CD8-F09C-5B09-7AFA-5BAA4AF48498}"/>
           </ac:spMkLst>
         </pc:spChg>
-        <pc:spChg chg="add mod">
-          <ac:chgData name="Kristoffer Gulmark Poulsen" userId="ad511437-3b62-45cf-8f4e-1fb459602f33" providerId="ADAL" clId="{1F7BF2AE-28F5-48AC-A1F8-94893075803A}" dt="2023-04-27T11:19:57.568" v="448" actId="164"/>
+        <pc:spChg chg="add mod topLvl">
+          <ac:chgData name="Kristoffer Gulmark Poulsen" userId="ad511437-3b62-45cf-8f4e-1fb459602f33" providerId="ADAL" clId="{1F7BF2AE-28F5-48AC-A1F8-94893075803A}" dt="2023-04-27T12:10:58.962" v="563" actId="165"/>
           <ac:spMkLst>
             <pc:docMk/>
             <pc:sldMk cId="1355665285" sldId="256"/>
             <ac:spMk id="54" creationId="{F2B95359-4D9E-4D7F-E58C-7E2241B1A7C1}"/>
           </ac:spMkLst>
         </pc:spChg>
-        <pc:grpChg chg="add mod">
-          <ac:chgData name="Kristoffer Gulmark Poulsen" userId="ad511437-3b62-45cf-8f4e-1fb459602f33" providerId="ADAL" clId="{1F7BF2AE-28F5-48AC-A1F8-94893075803A}" dt="2023-04-27T11:21:52.843" v="468" actId="1076"/>
+        <pc:grpChg chg="add del mod">
+          <ac:chgData name="Kristoffer Gulmark Poulsen" userId="ad511437-3b62-45cf-8f4e-1fb459602f33" providerId="ADAL" clId="{1F7BF2AE-28F5-48AC-A1F8-94893075803A}" dt="2023-04-27T12:10:58.962" v="563" actId="165"/>
           <ac:grpSpMkLst>
             <pc:docMk/>
             <pc:sldMk cId="1355665285" sldId="256"/>
@@ -3507,358 +3507,337 @@
           <a:chExt cx="0" cy="0"/>
         </a:xfrm>
       </p:grpSpPr>
-      <p:grpSp>
-        <p:nvGrpSpPr>
-          <p:cNvPr id="56" name="Gruppe 55">
-            <a:extLst>
-              <a:ext uri="{FF2B5EF4-FFF2-40B4-BE49-F238E27FC236}">
-                <a16:creationId xmlns:a16="http://schemas.microsoft.com/office/drawing/2014/main" id="{5F6AD4E5-1E0C-7693-807C-BE7FCFBD5588}"/>
-              </a:ext>
-            </a:extLst>
-          </p:cNvPr>
-          <p:cNvGrpSpPr/>
+      <p:sp>
+        <p:nvSpPr>
+          <p:cNvPr id="4" name="Rektangel: afrundede hjørner 3">
+            <a:extLst>
+              <a:ext uri="{FF2B5EF4-FFF2-40B4-BE49-F238E27FC236}">
+                <a16:creationId xmlns:a16="http://schemas.microsoft.com/office/drawing/2014/main" id="{086FDD55-4308-5CD2-4485-5CB2BA2E3665}"/>
+              </a:ext>
+            </a:extLst>
+          </p:cNvPr>
+          <p:cNvSpPr/>
           <p:nvPr/>
-        </p:nvGrpSpPr>
-        <p:grpSpPr>
+        </p:nvSpPr>
+        <p:spPr>
           <a:xfrm>
-            <a:off x="1505335" y="2327988"/>
-            <a:ext cx="7556248" cy="1055913"/>
-            <a:chOff x="87082" y="2645230"/>
-            <a:chExt cx="7556248" cy="1055913"/>
+            <a:off x="7724195" y="2637452"/>
+            <a:ext cx="1337388" cy="746448"/>
           </a:xfrm>
-        </p:grpSpPr>
-        <p:sp>
-          <p:nvSpPr>
-            <p:cNvPr id="4" name="Rektangel: afrundede hjørner 3">
-              <a:extLst>
-                <a:ext uri="{FF2B5EF4-FFF2-40B4-BE49-F238E27FC236}">
-                  <a16:creationId xmlns:a16="http://schemas.microsoft.com/office/drawing/2014/main" id="{086FDD55-4308-5CD2-4485-5CB2BA2E3665}"/>
-                </a:ext>
-              </a:extLst>
-            </p:cNvPr>
-            <p:cNvSpPr/>
-            <p:nvPr/>
-          </p:nvSpPr>
-          <p:spPr>
-            <a:xfrm>
-              <a:off x="6305942" y="2645230"/>
-              <a:ext cx="1337388" cy="1032588"/>
-            </a:xfrm>
-            <a:prstGeom prst="roundRect">
-              <a:avLst/>
-            </a:prstGeom>
+          <a:prstGeom prst="roundRect">
+            <a:avLst/>
+          </a:prstGeom>
+          <a:solidFill>
+            <a:schemeClr val="accent1">
+              <a:lumMod val="20000"/>
+              <a:lumOff val="80000"/>
+            </a:schemeClr>
+          </a:solidFill>
+          <a:ln w="28575">
             <a:solidFill>
-              <a:schemeClr val="accent1">
-                <a:lumMod val="20000"/>
-                <a:lumOff val="80000"/>
-              </a:schemeClr>
+              <a:schemeClr val="accent1"/>
             </a:solidFill>
-            <a:ln w="28575">
-              <a:solidFill>
-                <a:schemeClr val="accent1"/>
-              </a:solidFill>
-            </a:ln>
-          </p:spPr>
-          <p:style>
-            <a:lnRef idx="2">
-              <a:schemeClr val="accent1">
-                <a:shade val="50000"/>
-              </a:schemeClr>
-            </a:lnRef>
-            <a:fillRef idx="1">
+          </a:ln>
+        </p:spPr>
+        <p:style>
+          <a:lnRef idx="2">
+            <a:schemeClr val="accent1">
+              <a:shade val="50000"/>
+            </a:schemeClr>
+          </a:lnRef>
+          <a:fillRef idx="1">
+            <a:schemeClr val="accent1"/>
+          </a:fillRef>
+          <a:effectRef idx="0">
+            <a:schemeClr val="accent1"/>
+          </a:effectRef>
+          <a:fontRef idx="minor">
+            <a:schemeClr val="lt1"/>
+          </a:fontRef>
+        </p:style>
+        <p:txBody>
+          <a:bodyPr rtlCol="0" anchor="ctr"/>
+          <a:lstStyle/>
+          <a:p>
+            <a:pPr algn="ctr"/>
+            <a:r>
+              <a:rPr lang="en-US" sz="1200" b="1" dirty="0">
+                <a:solidFill>
+                  <a:schemeClr val="accent1"/>
+                </a:solidFill>
+              </a:rPr>
+              <a:t>Research Consultancy</a:t>
+            </a:r>
+          </a:p>
+        </p:txBody>
+      </p:sp>
+      <p:sp>
+        <p:nvSpPr>
+          <p:cNvPr id="6" name="Rektangel: afrundede hjørner 5">
+            <a:extLst>
+              <a:ext uri="{FF2B5EF4-FFF2-40B4-BE49-F238E27FC236}">
+                <a16:creationId xmlns:a16="http://schemas.microsoft.com/office/drawing/2014/main" id="{1CE5C770-9B7D-577A-38CC-9CE75C516A3B}"/>
+              </a:ext>
+            </a:extLst>
+          </p:cNvPr>
+          <p:cNvSpPr/>
+          <p:nvPr/>
+        </p:nvSpPr>
+        <p:spPr>
+          <a:xfrm>
+            <a:off x="3035549" y="2637453"/>
+            <a:ext cx="1337388" cy="746448"/>
+          </a:xfrm>
+          <a:prstGeom prst="roundRect">
+            <a:avLst/>
+          </a:prstGeom>
+          <a:solidFill>
+            <a:schemeClr val="accent1">
+              <a:lumMod val="20000"/>
+              <a:lumOff val="80000"/>
+            </a:schemeClr>
+          </a:solidFill>
+          <a:ln w="28575">
+            <a:solidFill>
               <a:schemeClr val="accent1"/>
-            </a:fillRef>
-            <a:effectRef idx="0">
+            </a:solidFill>
+          </a:ln>
+        </p:spPr>
+        <p:style>
+          <a:lnRef idx="2">
+            <a:schemeClr val="accent1">
+              <a:shade val="50000"/>
+            </a:schemeClr>
+          </a:lnRef>
+          <a:fillRef idx="1">
+            <a:schemeClr val="accent1"/>
+          </a:fillRef>
+          <a:effectRef idx="0">
+            <a:schemeClr val="accent1"/>
+          </a:effectRef>
+          <a:fontRef idx="minor">
+            <a:schemeClr val="lt1"/>
+          </a:fontRef>
+        </p:style>
+        <p:txBody>
+          <a:bodyPr rtlCol="0" anchor="ctr"/>
+          <a:lstStyle/>
+          <a:p>
+            <a:pPr algn="ctr"/>
+            <a:r>
+              <a:rPr lang="en-US" sz="1200" b="1" dirty="0">
+                <a:solidFill>
+                  <a:schemeClr val="accent1"/>
+                </a:solidFill>
+              </a:rPr>
+              <a:t>Teaching Activities</a:t>
+            </a:r>
+          </a:p>
+        </p:txBody>
+      </p:sp>
+      <p:sp>
+        <p:nvSpPr>
+          <p:cNvPr id="24" name="Rektangel: afrundede hjørner 23">
+            <a:extLst>
+              <a:ext uri="{FF2B5EF4-FFF2-40B4-BE49-F238E27FC236}">
+                <a16:creationId xmlns:a16="http://schemas.microsoft.com/office/drawing/2014/main" id="{9BEECAA6-CFCD-8DDE-CDE5-DBCC76C24E36}"/>
+              </a:ext>
+            </a:extLst>
+          </p:cNvPr>
+          <p:cNvSpPr/>
+          <p:nvPr/>
+        </p:nvSpPr>
+        <p:spPr>
+          <a:xfrm>
+            <a:off x="6161313" y="2637453"/>
+            <a:ext cx="1337388" cy="746448"/>
+          </a:xfrm>
+          <a:prstGeom prst="roundRect">
+            <a:avLst/>
+          </a:prstGeom>
+          <a:solidFill>
+            <a:schemeClr val="accent1">
+              <a:lumMod val="20000"/>
+              <a:lumOff val="80000"/>
+            </a:schemeClr>
+          </a:solidFill>
+          <a:ln w="28575">
+            <a:solidFill>
               <a:schemeClr val="accent1"/>
-            </a:effectRef>
-            <a:fontRef idx="minor">
-              <a:schemeClr val="lt1"/>
-            </a:fontRef>
-          </p:style>
-          <p:txBody>
-            <a:bodyPr rtlCol="0" anchor="ctr"/>
-            <a:lstStyle/>
-            <a:p>
-              <a:pPr algn="ctr"/>
-              <a:r>
-                <a:rPr lang="en-US" sz="1200" b="1" dirty="0">
-                  <a:solidFill>
-                    <a:schemeClr val="accent1"/>
-                  </a:solidFill>
-                </a:rPr>
-                <a:t>Research Consultancy</a:t>
-              </a:r>
-            </a:p>
-          </p:txBody>
-        </p:sp>
-        <p:sp>
-          <p:nvSpPr>
-            <p:cNvPr id="6" name="Rektangel: afrundede hjørner 5">
-              <a:extLst>
-                <a:ext uri="{FF2B5EF4-FFF2-40B4-BE49-F238E27FC236}">
-                  <a16:creationId xmlns:a16="http://schemas.microsoft.com/office/drawing/2014/main" id="{1CE5C770-9B7D-577A-38CC-9CE75C516A3B}"/>
-                </a:ext>
-              </a:extLst>
-            </p:cNvPr>
-            <p:cNvSpPr/>
-            <p:nvPr/>
-          </p:nvSpPr>
-          <p:spPr>
-            <a:xfrm>
-              <a:off x="1617296" y="2668555"/>
-              <a:ext cx="1337388" cy="1032588"/>
-            </a:xfrm>
-            <a:prstGeom prst="roundRect">
-              <a:avLst/>
-            </a:prstGeom>
+            </a:solidFill>
+          </a:ln>
+        </p:spPr>
+        <p:style>
+          <a:lnRef idx="2">
+            <a:schemeClr val="accent1">
+              <a:shade val="50000"/>
+            </a:schemeClr>
+          </a:lnRef>
+          <a:fillRef idx="1">
+            <a:schemeClr val="accent1"/>
+          </a:fillRef>
+          <a:effectRef idx="0">
+            <a:schemeClr val="accent1"/>
+          </a:effectRef>
+          <a:fontRef idx="minor">
+            <a:schemeClr val="lt1"/>
+          </a:fontRef>
+        </p:style>
+        <p:txBody>
+          <a:bodyPr rtlCol="0" anchor="ctr"/>
+          <a:lstStyle/>
+          <a:p>
+            <a:pPr algn="ctr"/>
+            <a:r>
+              <a:rPr lang="en-US" sz="1200" b="1" dirty="0">
+                <a:solidFill>
+                  <a:schemeClr val="accent1"/>
+                </a:solidFill>
+              </a:rPr>
+              <a:t>Daily User Support</a:t>
+            </a:r>
+          </a:p>
+        </p:txBody>
+      </p:sp>
+      <p:sp>
+        <p:nvSpPr>
+          <p:cNvPr id="45" name="Rektangel: afrundede hjørner 44">
+            <a:extLst>
+              <a:ext uri="{FF2B5EF4-FFF2-40B4-BE49-F238E27FC236}">
+                <a16:creationId xmlns:a16="http://schemas.microsoft.com/office/drawing/2014/main" id="{DA727CD8-F09C-5B09-7AFA-5BAA4AF48498}"/>
+              </a:ext>
+            </a:extLst>
+          </p:cNvPr>
+          <p:cNvSpPr/>
+          <p:nvPr/>
+        </p:nvSpPr>
+        <p:spPr>
+          <a:xfrm>
+            <a:off x="4598431" y="2637453"/>
+            <a:ext cx="1337388" cy="746448"/>
+          </a:xfrm>
+          <a:prstGeom prst="roundRect">
+            <a:avLst/>
+          </a:prstGeom>
+          <a:solidFill>
+            <a:schemeClr val="accent1">
+              <a:lumMod val="20000"/>
+              <a:lumOff val="80000"/>
+            </a:schemeClr>
+          </a:solidFill>
+          <a:ln w="28575">
             <a:solidFill>
-              <a:schemeClr val="accent1">
-                <a:lumMod val="20000"/>
-                <a:lumOff val="80000"/>
-              </a:schemeClr>
+              <a:schemeClr val="accent1"/>
             </a:solidFill>
-            <a:ln w="28575">
-              <a:solidFill>
-                <a:schemeClr val="accent1"/>
-              </a:solidFill>
-            </a:ln>
-          </p:spPr>
-          <p:style>
-            <a:lnRef idx="2">
-              <a:schemeClr val="accent1">
-                <a:shade val="50000"/>
-              </a:schemeClr>
-            </a:lnRef>
-            <a:fillRef idx="1">
+          </a:ln>
+        </p:spPr>
+        <p:style>
+          <a:lnRef idx="2">
+            <a:schemeClr val="accent1">
+              <a:shade val="50000"/>
+            </a:schemeClr>
+          </a:lnRef>
+          <a:fillRef idx="1">
+            <a:schemeClr val="accent1"/>
+          </a:fillRef>
+          <a:effectRef idx="0">
+            <a:schemeClr val="accent1"/>
+          </a:effectRef>
+          <a:fontRef idx="minor">
+            <a:schemeClr val="lt1"/>
+          </a:fontRef>
+        </p:style>
+        <p:txBody>
+          <a:bodyPr rtlCol="0" anchor="ctr"/>
+          <a:lstStyle/>
+          <a:p>
+            <a:pPr algn="ctr"/>
+            <a:r>
+              <a:rPr lang="da-DK" sz="1200" b="1" dirty="0">
+                <a:solidFill>
+                  <a:schemeClr val="accent1"/>
+                </a:solidFill>
+              </a:rPr>
+              <a:t>Development of HPC at CBS</a:t>
+            </a:r>
+          </a:p>
+        </p:txBody>
+      </p:sp>
+      <p:sp>
+        <p:nvSpPr>
+          <p:cNvPr id="54" name="Rektangel: afrundede hjørner 53">
+            <a:extLst>
+              <a:ext uri="{FF2B5EF4-FFF2-40B4-BE49-F238E27FC236}">
+                <a16:creationId xmlns:a16="http://schemas.microsoft.com/office/drawing/2014/main" id="{F2B95359-4D9E-4D7F-E58C-7E2241B1A7C1}"/>
+              </a:ext>
+            </a:extLst>
+          </p:cNvPr>
+          <p:cNvSpPr/>
+          <p:nvPr/>
+        </p:nvSpPr>
+        <p:spPr>
+          <a:xfrm>
+            <a:off x="1505335" y="2637453"/>
+            <a:ext cx="1337388" cy="746448"/>
+          </a:xfrm>
+          <a:prstGeom prst="roundRect">
+            <a:avLst/>
+          </a:prstGeom>
+          <a:solidFill>
+            <a:schemeClr val="accent1">
+              <a:lumMod val="20000"/>
+              <a:lumOff val="80000"/>
+            </a:schemeClr>
+          </a:solidFill>
+          <a:ln w="28575">
+            <a:solidFill>
               <a:schemeClr val="accent1"/>
-            </a:fillRef>
-            <a:effectRef idx="0">
-              <a:schemeClr val="accent1"/>
-            </a:effectRef>
-            <a:fontRef idx="minor">
-              <a:schemeClr val="lt1"/>
-            </a:fontRef>
-          </p:style>
-          <p:txBody>
-            <a:bodyPr rtlCol="0" anchor="ctr"/>
-            <a:lstStyle/>
-            <a:p>
-              <a:pPr algn="ctr"/>
-              <a:r>
-                <a:rPr lang="en-US" sz="1200" b="1" dirty="0">
-                  <a:solidFill>
-                    <a:schemeClr val="accent1"/>
-                  </a:solidFill>
-                </a:rPr>
-                <a:t>Teaching Activities</a:t>
-              </a:r>
-            </a:p>
-          </p:txBody>
-        </p:sp>
-        <p:sp>
-          <p:nvSpPr>
-            <p:cNvPr id="24" name="Rektangel: afrundede hjørner 23">
-              <a:extLst>
-                <a:ext uri="{FF2B5EF4-FFF2-40B4-BE49-F238E27FC236}">
-                  <a16:creationId xmlns:a16="http://schemas.microsoft.com/office/drawing/2014/main" id="{9BEECAA6-CFCD-8DDE-CDE5-DBCC76C24E36}"/>
-                </a:ext>
-              </a:extLst>
-            </p:cNvPr>
-            <p:cNvSpPr/>
-            <p:nvPr/>
-          </p:nvSpPr>
-          <p:spPr>
-            <a:xfrm>
-              <a:off x="4743060" y="2668555"/>
-              <a:ext cx="1337388" cy="1032588"/>
-            </a:xfrm>
-            <a:prstGeom prst="roundRect">
-              <a:avLst/>
-            </a:prstGeom>
-            <a:solidFill>
-              <a:schemeClr val="accent1">
-                <a:lumMod val="20000"/>
-                <a:lumOff val="80000"/>
-              </a:schemeClr>
             </a:solidFill>
-            <a:ln w="28575">
-              <a:solidFill>
-                <a:schemeClr val="accent1"/>
-              </a:solidFill>
-            </a:ln>
-          </p:spPr>
-          <p:style>
-            <a:lnRef idx="2">
-              <a:schemeClr val="accent1">
-                <a:shade val="50000"/>
-              </a:schemeClr>
-            </a:lnRef>
-            <a:fillRef idx="1">
-              <a:schemeClr val="accent1"/>
-            </a:fillRef>
-            <a:effectRef idx="0">
-              <a:schemeClr val="accent1"/>
-            </a:effectRef>
-            <a:fontRef idx="minor">
-              <a:schemeClr val="lt1"/>
-            </a:fontRef>
-          </p:style>
-          <p:txBody>
-            <a:bodyPr rtlCol="0" anchor="ctr"/>
-            <a:lstStyle/>
-            <a:p>
-              <a:pPr algn="ctr"/>
-              <a:r>
-                <a:rPr lang="en-US" sz="1200" b="1" dirty="0">
-                  <a:solidFill>
-                    <a:schemeClr val="accent1"/>
-                  </a:solidFill>
-                </a:rPr>
-                <a:t>Daily User Support</a:t>
-              </a:r>
-            </a:p>
-          </p:txBody>
-        </p:sp>
-        <p:sp>
-          <p:nvSpPr>
-            <p:cNvPr id="45" name="Rektangel: afrundede hjørner 44">
-              <a:extLst>
-                <a:ext uri="{FF2B5EF4-FFF2-40B4-BE49-F238E27FC236}">
-                  <a16:creationId xmlns:a16="http://schemas.microsoft.com/office/drawing/2014/main" id="{DA727CD8-F09C-5B09-7AFA-5BAA4AF48498}"/>
-                </a:ext>
-              </a:extLst>
-            </p:cNvPr>
-            <p:cNvSpPr/>
-            <p:nvPr/>
-          </p:nvSpPr>
-          <p:spPr>
-            <a:xfrm>
-              <a:off x="3180178" y="2668555"/>
-              <a:ext cx="1337388" cy="1032588"/>
-            </a:xfrm>
-            <a:prstGeom prst="roundRect">
-              <a:avLst/>
-            </a:prstGeom>
-            <a:solidFill>
-              <a:schemeClr val="accent1">
-                <a:lumMod val="20000"/>
-                <a:lumOff val="80000"/>
-              </a:schemeClr>
-            </a:solidFill>
-            <a:ln w="28575">
-              <a:solidFill>
-                <a:schemeClr val="accent1"/>
-              </a:solidFill>
-            </a:ln>
-          </p:spPr>
-          <p:style>
-            <a:lnRef idx="2">
-              <a:schemeClr val="accent1">
-                <a:shade val="50000"/>
-              </a:schemeClr>
-            </a:lnRef>
-            <a:fillRef idx="1">
-              <a:schemeClr val="accent1"/>
-            </a:fillRef>
-            <a:effectRef idx="0">
-              <a:schemeClr val="accent1"/>
-            </a:effectRef>
-            <a:fontRef idx="minor">
-              <a:schemeClr val="lt1"/>
-            </a:fontRef>
-          </p:style>
-          <p:txBody>
-            <a:bodyPr rtlCol="0" anchor="ctr"/>
-            <a:lstStyle/>
-            <a:p>
-              <a:pPr algn="ctr"/>
-              <a:r>
-                <a:rPr lang="da-DK" sz="1200" b="1" dirty="0">
-                  <a:solidFill>
-                    <a:schemeClr val="accent1"/>
-                  </a:solidFill>
-                </a:rPr>
-                <a:t>Development of HPC at CBS</a:t>
-              </a:r>
-            </a:p>
-          </p:txBody>
-        </p:sp>
-        <p:sp>
-          <p:nvSpPr>
-            <p:cNvPr id="54" name="Rektangel: afrundede hjørner 53">
-              <a:extLst>
-                <a:ext uri="{FF2B5EF4-FFF2-40B4-BE49-F238E27FC236}">
-                  <a16:creationId xmlns:a16="http://schemas.microsoft.com/office/drawing/2014/main" id="{F2B95359-4D9E-4D7F-E58C-7E2241B1A7C1}"/>
-                </a:ext>
-              </a:extLst>
-            </p:cNvPr>
-            <p:cNvSpPr/>
-            <p:nvPr/>
-          </p:nvSpPr>
-          <p:spPr>
-            <a:xfrm>
-              <a:off x="87082" y="2668555"/>
-              <a:ext cx="1337388" cy="1032588"/>
-            </a:xfrm>
-            <a:prstGeom prst="roundRect">
-              <a:avLst/>
-            </a:prstGeom>
-            <a:solidFill>
-              <a:schemeClr val="accent1">
-                <a:lumMod val="20000"/>
-                <a:lumOff val="80000"/>
-              </a:schemeClr>
-            </a:solidFill>
-            <a:ln w="28575">
-              <a:solidFill>
-                <a:schemeClr val="accent1"/>
-              </a:solidFill>
-            </a:ln>
-          </p:spPr>
-          <p:style>
-            <a:lnRef idx="2">
-              <a:schemeClr val="accent1">
-                <a:shade val="50000"/>
-              </a:schemeClr>
-            </a:lnRef>
-            <a:fillRef idx="1">
-              <a:schemeClr val="accent1"/>
-            </a:fillRef>
-            <a:effectRef idx="0">
-              <a:schemeClr val="accent1"/>
-            </a:effectRef>
-            <a:fontRef idx="minor">
-              <a:schemeClr val="lt1"/>
-            </a:fontRef>
-          </p:style>
-          <p:txBody>
-            <a:bodyPr rtlCol="0" anchor="ctr"/>
-            <a:lstStyle/>
-            <a:p>
-              <a:pPr algn="ctr"/>
-              <a:r>
-                <a:rPr lang="en-US" sz="1200" b="1" dirty="0">
-                  <a:solidFill>
-                    <a:schemeClr val="accent1"/>
-                  </a:solidFill>
-                </a:rPr>
-                <a:t>Tutorials &amp; </a:t>
-              </a:r>
-            </a:p>
-            <a:p>
-              <a:pPr algn="ctr"/>
-              <a:r>
-                <a:rPr lang="en-US" sz="1200" b="1" dirty="0">
-                  <a:solidFill>
-                    <a:schemeClr val="accent1"/>
-                  </a:solidFill>
-                </a:rPr>
-                <a:t>User Utilities</a:t>
-              </a:r>
-            </a:p>
-          </p:txBody>
-        </p:sp>
-      </p:grpSp>
+          </a:ln>
+        </p:spPr>
+        <p:style>
+          <a:lnRef idx="2">
+            <a:schemeClr val="accent1">
+              <a:shade val="50000"/>
+            </a:schemeClr>
+          </a:lnRef>
+          <a:fillRef idx="1">
+            <a:schemeClr val="accent1"/>
+          </a:fillRef>
+          <a:effectRef idx="0">
+            <a:schemeClr val="accent1"/>
+          </a:effectRef>
+          <a:fontRef idx="minor">
+            <a:schemeClr val="lt1"/>
+          </a:fontRef>
+        </p:style>
+        <p:txBody>
+          <a:bodyPr rtlCol="0" anchor="ctr"/>
+          <a:lstStyle/>
+          <a:p>
+            <a:pPr algn="ctr"/>
+            <a:r>
+              <a:rPr lang="en-US" sz="1200" b="1" dirty="0">
+                <a:solidFill>
+                  <a:schemeClr val="accent1"/>
+                </a:solidFill>
+              </a:rPr>
+              <a:t>Tutorials &amp; </a:t>
+            </a:r>
+          </a:p>
+          <a:p>
+            <a:pPr algn="ctr"/>
+            <a:r>
+              <a:rPr lang="en-US" sz="1200" b="1" dirty="0">
+                <a:solidFill>
+                  <a:schemeClr val="accent1"/>
+                </a:solidFill>
+              </a:rPr>
+              <a:t>User Utilities</a:t>
+            </a:r>
+          </a:p>
+        </p:txBody>
+      </p:sp>
     </p:spTree>
     <p:extLst>
       <p:ext uri="{BB962C8B-B14F-4D97-AF65-F5344CB8AC3E}">

--- a/profile/images/activities.pptx
+++ b/profile/images/activities.pptx
@@ -125,12 +125,12 @@
   <pc:docChgLst>
     <pc:chgData name="Kristoffer Gulmark Poulsen" userId="ad511437-3b62-45cf-8f4e-1fb459602f33" providerId="ADAL" clId="{1F7BF2AE-28F5-48AC-A1F8-94893075803A}"/>
     <pc:docChg chg="undo custSel addSld modSld">
-      <pc:chgData name="Kristoffer Gulmark Poulsen" userId="ad511437-3b62-45cf-8f4e-1fb459602f33" providerId="ADAL" clId="{1F7BF2AE-28F5-48AC-A1F8-94893075803A}" dt="2023-04-27T12:10:58.962" v="563" actId="165"/>
+      <pc:chgData name="Kristoffer Gulmark Poulsen" userId="ad511437-3b62-45cf-8f4e-1fb459602f33" providerId="ADAL" clId="{1F7BF2AE-28F5-48AC-A1F8-94893075803A}" dt="2023-04-27T12:58:20.938" v="585" actId="14100"/>
       <pc:docMkLst>
         <pc:docMk/>
       </pc:docMkLst>
       <pc:sldChg chg="addSp delSp modSp new mod modClrScheme chgLayout">
-        <pc:chgData name="Kristoffer Gulmark Poulsen" userId="ad511437-3b62-45cf-8f4e-1fb459602f33" providerId="ADAL" clId="{1F7BF2AE-28F5-48AC-A1F8-94893075803A}" dt="2023-04-27T12:10:58.962" v="563" actId="165"/>
+        <pc:chgData name="Kristoffer Gulmark Poulsen" userId="ad511437-3b62-45cf-8f4e-1fb459602f33" providerId="ADAL" clId="{1F7BF2AE-28F5-48AC-A1F8-94893075803A}" dt="2023-04-27T12:58:20.938" v="585" actId="14100"/>
         <pc:sldMkLst>
           <pc:docMk/>
           <pc:sldMk cId="1355665285" sldId="256"/>
@@ -152,7 +152,7 @@
           </ac:spMkLst>
         </pc:spChg>
         <pc:spChg chg="add mod topLvl">
-          <ac:chgData name="Kristoffer Gulmark Poulsen" userId="ad511437-3b62-45cf-8f4e-1fb459602f33" providerId="ADAL" clId="{1F7BF2AE-28F5-48AC-A1F8-94893075803A}" dt="2023-04-27T12:10:58.962" v="563" actId="165"/>
+          <ac:chgData name="Kristoffer Gulmark Poulsen" userId="ad511437-3b62-45cf-8f4e-1fb459602f33" providerId="ADAL" clId="{1F7BF2AE-28F5-48AC-A1F8-94893075803A}" dt="2023-04-27T12:58:20.938" v="585" actId="14100"/>
           <ac:spMkLst>
             <pc:docMk/>
             <pc:sldMk cId="1355665285" sldId="256"/>
@@ -168,7 +168,7 @@
           </ac:spMkLst>
         </pc:spChg>
         <pc:spChg chg="add mod topLvl">
-          <ac:chgData name="Kristoffer Gulmark Poulsen" userId="ad511437-3b62-45cf-8f4e-1fb459602f33" providerId="ADAL" clId="{1F7BF2AE-28F5-48AC-A1F8-94893075803A}" dt="2023-04-27T12:10:58.962" v="563" actId="165"/>
+          <ac:chgData name="Kristoffer Gulmark Poulsen" userId="ad511437-3b62-45cf-8f4e-1fb459602f33" providerId="ADAL" clId="{1F7BF2AE-28F5-48AC-A1F8-94893075803A}" dt="2023-04-27T12:58:11.705" v="582" actId="14100"/>
           <ac:spMkLst>
             <pc:docMk/>
             <pc:sldMk cId="1355665285" sldId="256"/>
@@ -184,7 +184,7 @@
           </ac:spMkLst>
         </pc:spChg>
         <pc:spChg chg="add mod topLvl">
-          <ac:chgData name="Kristoffer Gulmark Poulsen" userId="ad511437-3b62-45cf-8f4e-1fb459602f33" providerId="ADAL" clId="{1F7BF2AE-28F5-48AC-A1F8-94893075803A}" dt="2023-04-27T12:10:58.962" v="563" actId="165"/>
+          <ac:chgData name="Kristoffer Gulmark Poulsen" userId="ad511437-3b62-45cf-8f4e-1fb459602f33" providerId="ADAL" clId="{1F7BF2AE-28F5-48AC-A1F8-94893075803A}" dt="2023-04-27T12:58:17.860" v="584" actId="14100"/>
           <ac:spMkLst>
             <pc:docMk/>
             <pc:sldMk cId="1355665285" sldId="256"/>
@@ -208,7 +208,7 @@
           </ac:spMkLst>
         </pc:spChg>
         <pc:spChg chg="add mod topLvl">
-          <ac:chgData name="Kristoffer Gulmark Poulsen" userId="ad511437-3b62-45cf-8f4e-1fb459602f33" providerId="ADAL" clId="{1F7BF2AE-28F5-48AC-A1F8-94893075803A}" dt="2023-04-27T12:10:58.962" v="563" actId="165"/>
+          <ac:chgData name="Kristoffer Gulmark Poulsen" userId="ad511437-3b62-45cf-8f4e-1fb459602f33" providerId="ADAL" clId="{1F7BF2AE-28F5-48AC-A1F8-94893075803A}" dt="2023-04-27T12:58:13.984" v="583" actId="14100"/>
           <ac:spMkLst>
             <pc:docMk/>
             <pc:sldMk cId="1355665285" sldId="256"/>
@@ -216,7 +216,7 @@
           </ac:spMkLst>
         </pc:spChg>
         <pc:spChg chg="add mod topLvl">
-          <ac:chgData name="Kristoffer Gulmark Poulsen" userId="ad511437-3b62-45cf-8f4e-1fb459602f33" providerId="ADAL" clId="{1F7BF2AE-28F5-48AC-A1F8-94893075803A}" dt="2023-04-27T12:10:58.962" v="563" actId="165"/>
+          <ac:chgData name="Kristoffer Gulmark Poulsen" userId="ad511437-3b62-45cf-8f4e-1fb459602f33" providerId="ADAL" clId="{1F7BF2AE-28F5-48AC-A1F8-94893075803A}" dt="2023-04-27T12:57:52.188" v="575" actId="14100"/>
           <ac:spMkLst>
             <pc:docMk/>
             <pc:sldMk cId="1355665285" sldId="256"/>
@@ -3521,8 +3521,8 @@
         </p:nvSpPr>
         <p:spPr>
           <a:xfrm>
-            <a:off x="7724195" y="2637452"/>
-            <a:ext cx="1337388" cy="746448"/>
+            <a:off x="9396878" y="1754378"/>
+            <a:ext cx="1148322" cy="619715"/>
           </a:xfrm>
           <a:prstGeom prst="roundRect">
             <a:avLst/>
@@ -3585,8 +3585,8 @@
         </p:nvSpPr>
         <p:spPr>
           <a:xfrm>
-            <a:off x="3035549" y="2637453"/>
-            <a:ext cx="1337388" cy="746448"/>
+            <a:off x="4680153" y="1754155"/>
+            <a:ext cx="1148324" cy="620654"/>
           </a:xfrm>
           <a:prstGeom prst="roundRect">
             <a:avLst/>
@@ -3649,8 +3649,8 @@
         </p:nvSpPr>
         <p:spPr>
           <a:xfrm>
-            <a:off x="6161313" y="2637453"/>
-            <a:ext cx="1337388" cy="746448"/>
+            <a:off x="7811480" y="1755094"/>
+            <a:ext cx="1148322" cy="619715"/>
           </a:xfrm>
           <a:prstGeom prst="roundRect">
             <a:avLst/>
@@ -3713,8 +3713,8 @@
         </p:nvSpPr>
         <p:spPr>
           <a:xfrm>
-            <a:off x="4598431" y="2637453"/>
-            <a:ext cx="1337388" cy="746448"/>
+            <a:off x="6456326" y="1754155"/>
+            <a:ext cx="1148324" cy="620654"/>
           </a:xfrm>
           <a:prstGeom prst="roundRect">
             <a:avLst/>
@@ -3777,8 +3777,8 @@
         </p:nvSpPr>
         <p:spPr>
           <a:xfrm>
-            <a:off x="1505335" y="2637453"/>
-            <a:ext cx="1337388" cy="746448"/>
+            <a:off x="3035548" y="1754155"/>
+            <a:ext cx="1148323" cy="620654"/>
           </a:xfrm>
           <a:prstGeom prst="roundRect">
             <a:avLst/>
